--- a/MCG_Technology_Architecture_v2.pptx
+++ b/MCG_Technology_Architecture_v2.pptx
@@ -4912,7 +4912,7 @@
                 <a:ea typeface="Inter" pitchFamily="34" charset="-122"/>
                 <a:cs typeface="Inter" pitchFamily="34" charset="-120"/>
               </a:rPr>
-              <a:t>Remote Engine</a:t>
+              <a:t>Data Gateway</a:t>
             </a:r>
             <a:endParaRPr lang="en-US" sz="1000" dirty="0"/>
           </a:p>
@@ -4929,7 +4929,7 @@
                 <a:ea typeface="Inter" pitchFamily="34" charset="-122"/>
                 <a:cs typeface="Inter" pitchFamily="34" charset="-120"/>
               </a:rPr>
-              <a:t>Gen2</a:t>
+              <a:t>Streaming</a:t>
             </a:r>
             <a:endParaRPr lang="en-US" sz="1000" dirty="0"/>
           </a:p>
@@ -14391,7 +14391,7 @@
                 <a:ea typeface="Inter" pitchFamily="34" charset="-122"/>
                 <a:cs typeface="Inter" pitchFamily="34" charset="-120"/>
               </a:rPr>
-              <a:t>2 Gold-Layer Data Products</a:t>
+              <a:t>7 Gold-Layer Data Products</a:t>
             </a:r>
             <a:endParaRPr lang="en-US" sz="2200" dirty="0"/>
           </a:p>
@@ -14772,7 +14772,7 @@
                 <a:ea typeface="Inter" pitchFamily="34" charset="-122"/>
                 <a:cs typeface="Inter" pitchFamily="34" charset="-120"/>
               </a:rPr>
-              <a:t>Owner: Sophie Muller</a:t>
+              <a:t>Owner: Sophie Müller</a:t>
             </a:r>
             <a:endParaRPr lang="en-US" sz="1000" dirty="0"/>
           </a:p>
@@ -14865,6 +14865,1251 @@
         <p:spPr>
           <a:xfrm>
             <a:off x="3337560" y="2743200"/>
+            <a:ext cx="2697480" cy="274320"/>
+          </a:xfrm>
+          <a:prstGeom prst="rect">
+            <a:avLst/>
+          </a:prstGeom>
+          <a:noFill/>
+          <a:ln/>
+        </p:spPr>
+        <p:txBody>
+          <a:bodyPr wrap="square" rtlCol="0" anchor="ctr"/>
+          <a:lstStyle/>
+          <a:p>
+            <a:pPr algn="ctr" indent="0" marL="0">
+              <a:buNone/>
+            </a:pPr>
+            <a:r>
+              <a:rPr lang="en-US" sz="900" i="1" dirty="0">
+                <a:solidFill>
+                  <a:srgbClr val="A9B3B6"/>
+                </a:solidFill>
+                <a:latin typeface="Inter" pitchFamily="34" charset="0"/>
+                <a:ea typeface="Inter" pitchFamily="34" charset="-122"/>
+                <a:cs typeface="Inter" pitchFamily="34" charset="-120"/>
+              </a:rPr>
+              <a:t>Trust Score  •  API Sharing  •  Lineage</a:t>
+            </a:r>
+            <a:endParaRPr lang="en-US" sz="900" dirty="0"/>
+          </a:p>
+        </p:txBody>
+      </p:sp>
+      <p:sp>
+        <p:nvSpPr>
+          <p:cNvPr id="22" name="Shape 19"/>
+          <p:cNvSpPr/>
+          <p:nvPr/>
+        </p:nvSpPr>
+        <p:spPr>
+          <a:xfrm>
+            <a:off x="6217920" y="1005840"/>
+            <a:ext cx="2697480" cy="2331720"/>
+          </a:xfrm>
+          <a:prstGeom prst="roundRect">
+            <a:avLst>
+              <a:gd name="adj" fmla="val 4706"/>
+            </a:avLst>
+          </a:prstGeom>
+          <a:solidFill>
+            <a:srgbClr val="FFFFFF"/>
+          </a:solidFill>
+          <a:ln w="19050">
+            <a:solidFill>
+              <a:srgbClr val="19416C"/>
+            </a:solidFill>
+            <a:prstDash val="solid"/>
+          </a:ln>
+          <a:effectLst>
+            <a:outerShdw sx="100000" sy="100000" kx="0" ky="0" algn="bl" rotWithShape="0" blurRad="50800" dist="19050" dir="16200000">
+              <a:srgbClr val="000000">
+                <a:alpha val="8000"/>
+              </a:srgbClr>
+            </a:outerShdw>
+          </a:effectLst>
+        </p:spPr>
+      </p:sp>
+      <p:sp>
+        <p:nvSpPr>
+          <p:cNvPr id="23" name="Shape 20"/>
+          <p:cNvSpPr/>
+          <p:nvPr/>
+        </p:nvSpPr>
+        <p:spPr>
+          <a:xfrm>
+            <a:off x="6291072" y="1060704"/>
+            <a:ext cx="2551176" cy="54864"/>
+          </a:xfrm>
+          <a:prstGeom prst="rect">
+            <a:avLst/>
+          </a:prstGeom>
+          <a:solidFill>
+            <a:srgbClr val="19416C"/>
+          </a:solidFill>
+          <a:ln/>
+        </p:spPr>
+      </p:sp>
+      <p:sp>
+        <p:nvSpPr>
+          <p:cNvPr id="24" name="Text 21"/>
+          <p:cNvSpPr/>
+          <p:nvPr/>
+        </p:nvSpPr>
+        <p:spPr>
+          <a:xfrm>
+            <a:off x="6217920" y="1188720"/>
+            <a:ext cx="2697480" cy="411480"/>
+          </a:xfrm>
+          <a:prstGeom prst="rect">
+            <a:avLst/>
+          </a:prstGeom>
+          <a:noFill/>
+          <a:ln/>
+        </p:spPr>
+        <p:txBody>
+          <a:bodyPr wrap="square" rtlCol="0" anchor="ctr"/>
+          <a:lstStyle/>
+          <a:p>
+            <a:pPr algn="ctr" indent="0" marL="0">
+              <a:buNone/>
+            </a:pPr>
+            <a:r>
+              <a:rPr lang="en-US" sz="1300" b="1" dirty="0">
+                <a:solidFill>
+                  <a:srgbClr val="19416C"/>
+                </a:solidFill>
+                <a:latin typeface="Inter" pitchFamily="34" charset="0"/>
+                <a:ea typeface="Inter" pitchFamily="34" charset="-122"/>
+                <a:cs typeface="Inter" pitchFamily="34" charset="-120"/>
+              </a:rPr>
+              <a:t>Cold Chain Compliance</a:t>
+            </a:r>
+            <a:endParaRPr lang="en-US" sz="1300" dirty="0"/>
+          </a:p>
+        </p:txBody>
+      </p:sp>
+      <p:sp>
+        <p:nvSpPr>
+          <p:cNvPr id="25" name="Text 22"/>
+          <p:cNvSpPr/>
+          <p:nvPr/>
+        </p:nvSpPr>
+        <p:spPr>
+          <a:xfrm>
+            <a:off x="6400800" y="1691640"/>
+            <a:ext cx="2331720" cy="274320"/>
+          </a:xfrm>
+          <a:prstGeom prst="rect">
+            <a:avLst/>
+          </a:prstGeom>
+          <a:noFill/>
+          <a:ln/>
+        </p:spPr>
+        <p:txBody>
+          <a:bodyPr wrap="square" rtlCol="0" anchor="ctr"/>
+          <a:lstStyle/>
+          <a:p>
+            <a:pPr indent="0" marL="0">
+              <a:buNone/>
+            </a:pPr>
+            <a:r>
+              <a:rPr lang="en-US" sz="1000" dirty="0">
+                <a:solidFill>
+                  <a:srgbClr val="6B7280"/>
+                </a:solidFill>
+                <a:latin typeface="Inter" pitchFamily="34" charset="0"/>
+                <a:ea typeface="Inter" pitchFamily="34" charset="-122"/>
+                <a:cs typeface="Inter" pitchFamily="34" charset="-120"/>
+              </a:rPr>
+              <a:t>Owner: Lars Eriksson</a:t>
+            </a:r>
+            <a:endParaRPr lang="en-US" sz="1000" dirty="0"/>
+          </a:p>
+        </p:txBody>
+      </p:sp>
+      <p:sp>
+        <p:nvSpPr>
+          <p:cNvPr id="26" name="Text 23"/>
+          <p:cNvSpPr/>
+          <p:nvPr/>
+        </p:nvSpPr>
+        <p:spPr>
+          <a:xfrm>
+            <a:off x="6400800" y="1965960"/>
+            <a:ext cx="2331720" cy="274320"/>
+          </a:xfrm>
+          <a:prstGeom prst="rect">
+            <a:avLst/>
+          </a:prstGeom>
+          <a:noFill/>
+          <a:ln/>
+        </p:spPr>
+        <p:txBody>
+          <a:bodyPr wrap="square" rtlCol="0" anchor="ctr"/>
+          <a:lstStyle/>
+          <a:p>
+            <a:pPr indent="0" marL="0">
+              <a:buNone/>
+            </a:pPr>
+            <a:r>
+              <a:rPr lang="en-US" sz="1000" dirty="0">
+                <a:solidFill>
+                  <a:srgbClr val="6B7280"/>
+                </a:solidFill>
+                <a:latin typeface="Inter" pitchFamily="34" charset="0"/>
+                <a:ea typeface="Inter" pitchFamily="34" charset="-122"/>
+                <a:cs typeface="Inter" pitchFamily="34" charset="-120"/>
+              </a:rPr>
+              <a:t>Refresh: 5 min</a:t>
+            </a:r>
+            <a:endParaRPr lang="en-US" sz="1000" dirty="0"/>
+          </a:p>
+        </p:txBody>
+      </p:sp>
+      <p:sp>
+        <p:nvSpPr>
+          <p:cNvPr id="27" name="Text 24"/>
+          <p:cNvSpPr/>
+          <p:nvPr/>
+        </p:nvSpPr>
+        <p:spPr>
+          <a:xfrm>
+            <a:off x="6400800" y="2240280"/>
+            <a:ext cx="2331720" cy="274320"/>
+          </a:xfrm>
+          <a:prstGeom prst="rect">
+            <a:avLst/>
+          </a:prstGeom>
+          <a:noFill/>
+          <a:ln/>
+        </p:spPr>
+        <p:txBody>
+          <a:bodyPr wrap="square" rtlCol="0" anchor="ctr"/>
+          <a:lstStyle/>
+          <a:p>
+            <a:pPr indent="0" marL="0">
+              <a:buNone/>
+            </a:pPr>
+            <a:r>
+              <a:rPr lang="en-US" sz="1100" b="1" dirty="0">
+                <a:solidFill>
+                  <a:srgbClr val="19416C"/>
+                </a:solidFill>
+                <a:latin typeface="Inter" pitchFamily="34" charset="0"/>
+                <a:ea typeface="Inter" pitchFamily="34" charset="-122"/>
+                <a:cs typeface="Inter" pitchFamily="34" charset="-120"/>
+              </a:rPr>
+              <a:t>KPI: Exceedance: &lt; 2%</a:t>
+            </a:r>
+            <a:endParaRPr lang="en-US" sz="1100" dirty="0"/>
+          </a:p>
+        </p:txBody>
+      </p:sp>
+      <p:sp>
+        <p:nvSpPr>
+          <p:cNvPr id="28" name="Text 25"/>
+          <p:cNvSpPr/>
+          <p:nvPr/>
+        </p:nvSpPr>
+        <p:spPr>
+          <a:xfrm>
+            <a:off x="6217920" y="2743200"/>
+            <a:ext cx="2697480" cy="274320"/>
+          </a:xfrm>
+          <a:prstGeom prst="rect">
+            <a:avLst/>
+          </a:prstGeom>
+          <a:noFill/>
+          <a:ln/>
+        </p:spPr>
+        <p:txBody>
+          <a:bodyPr wrap="square" rtlCol="0" anchor="ctr"/>
+          <a:lstStyle/>
+          <a:p>
+            <a:pPr algn="ctr" indent="0" marL="0">
+              <a:buNone/>
+            </a:pPr>
+            <a:r>
+              <a:rPr lang="en-US" sz="900" i="1" dirty="0">
+                <a:solidFill>
+                  <a:srgbClr val="A9B3B6"/>
+                </a:solidFill>
+                <a:latin typeface="Inter" pitchFamily="34" charset="0"/>
+                <a:ea typeface="Inter" pitchFamily="34" charset="-122"/>
+                <a:cs typeface="Inter" pitchFamily="34" charset="-120"/>
+              </a:rPr>
+              <a:t>Trust Score  •  API Sharing  •  Lineage</a:t>
+            </a:r>
+            <a:endParaRPr lang="en-US" sz="900" dirty="0"/>
+          </a:p>
+        </p:txBody>
+      </p:sp>
+      <p:sp>
+        <p:nvSpPr>
+          <p:cNvPr id="29" name="Shape 26"/>
+          <p:cNvSpPr/>
+          <p:nvPr/>
+        </p:nvSpPr>
+        <p:spPr>
+          <a:xfrm>
+            <a:off x="9098280" y="1005840"/>
+            <a:ext cx="2697480" cy="2331720"/>
+          </a:xfrm>
+          <a:prstGeom prst="roundRect">
+            <a:avLst>
+              <a:gd name="adj" fmla="val 4706"/>
+            </a:avLst>
+          </a:prstGeom>
+          <a:solidFill>
+            <a:srgbClr val="FFFFFF"/>
+          </a:solidFill>
+          <a:ln w="19050">
+            <a:solidFill>
+              <a:srgbClr val="4CB393"/>
+            </a:solidFill>
+            <a:prstDash val="solid"/>
+          </a:ln>
+          <a:effectLst>
+            <a:outerShdw sx="100000" sy="100000" kx="0" ky="0" algn="bl" rotWithShape="0" blurRad="50800" dist="19050" dir="16200000">
+              <a:srgbClr val="000000">
+                <a:alpha val="8000"/>
+              </a:srgbClr>
+            </a:outerShdw>
+          </a:effectLst>
+        </p:spPr>
+      </p:sp>
+      <p:sp>
+        <p:nvSpPr>
+          <p:cNvPr id="30" name="Shape 27"/>
+          <p:cNvSpPr/>
+          <p:nvPr/>
+        </p:nvSpPr>
+        <p:spPr>
+          <a:xfrm>
+            <a:off x="9171432" y="1060704"/>
+            <a:ext cx="2551176" cy="54864"/>
+          </a:xfrm>
+          <a:prstGeom prst="rect">
+            <a:avLst/>
+          </a:prstGeom>
+          <a:solidFill>
+            <a:srgbClr val="4CB393"/>
+          </a:solidFill>
+          <a:ln/>
+        </p:spPr>
+      </p:sp>
+      <p:sp>
+        <p:nvSpPr>
+          <p:cNvPr id="31" name="Text 28"/>
+          <p:cNvSpPr/>
+          <p:nvPr/>
+        </p:nvSpPr>
+        <p:spPr>
+          <a:xfrm>
+            <a:off x="9098280" y="1188720"/>
+            <a:ext cx="2697480" cy="411480"/>
+          </a:xfrm>
+          <a:prstGeom prst="rect">
+            <a:avLst/>
+          </a:prstGeom>
+          <a:noFill/>
+          <a:ln/>
+        </p:spPr>
+        <p:txBody>
+          <a:bodyPr wrap="square" rtlCol="0" anchor="ctr"/>
+          <a:lstStyle/>
+          <a:p>
+            <a:pPr algn="ctr" indent="0" marL="0">
+              <a:buNone/>
+            </a:pPr>
+            <a:r>
+              <a:rPr lang="en-US" sz="1300" b="1" dirty="0">
+                <a:solidFill>
+                  <a:srgbClr val="19416C"/>
+                </a:solidFill>
+                <a:latin typeface="Inter" pitchFamily="34" charset="0"/>
+                <a:ea typeface="Inter" pitchFamily="34" charset="-122"/>
+                <a:cs typeface="Inter" pitchFamily="34" charset="-120"/>
+              </a:rPr>
+              <a:t>Product Master Health</a:t>
+            </a:r>
+            <a:endParaRPr lang="en-US" sz="1300" dirty="0"/>
+          </a:p>
+        </p:txBody>
+      </p:sp>
+      <p:sp>
+        <p:nvSpPr>
+          <p:cNvPr id="32" name="Text 29"/>
+          <p:cNvSpPr/>
+          <p:nvPr/>
+        </p:nvSpPr>
+        <p:spPr>
+          <a:xfrm>
+            <a:off x="9281160" y="1691640"/>
+            <a:ext cx="2331720" cy="274320"/>
+          </a:xfrm>
+          <a:prstGeom prst="rect">
+            <a:avLst/>
+          </a:prstGeom>
+          <a:noFill/>
+          <a:ln/>
+        </p:spPr>
+        <p:txBody>
+          <a:bodyPr wrap="square" rtlCol="0" anchor="ctr"/>
+          <a:lstStyle/>
+          <a:p>
+            <a:pPr indent="0" marL="0">
+              <a:buNone/>
+            </a:pPr>
+            <a:r>
+              <a:rPr lang="en-US" sz="1000" dirty="0">
+                <a:solidFill>
+                  <a:srgbClr val="6B7280"/>
+                </a:solidFill>
+                <a:latin typeface="Inter" pitchFamily="34" charset="0"/>
+                <a:ea typeface="Inter" pitchFamily="34" charset="-122"/>
+                <a:cs typeface="Inter" pitchFamily="34" charset="-120"/>
+              </a:rPr>
+              <a:t>Owner: Thomas Berger</a:t>
+            </a:r>
+            <a:endParaRPr lang="en-US" sz="1000" dirty="0"/>
+          </a:p>
+        </p:txBody>
+      </p:sp>
+      <p:sp>
+        <p:nvSpPr>
+          <p:cNvPr id="33" name="Text 30"/>
+          <p:cNvSpPr/>
+          <p:nvPr/>
+        </p:nvSpPr>
+        <p:spPr>
+          <a:xfrm>
+            <a:off x="9281160" y="1965960"/>
+            <a:ext cx="2331720" cy="274320"/>
+          </a:xfrm>
+          <a:prstGeom prst="rect">
+            <a:avLst/>
+          </a:prstGeom>
+          <a:noFill/>
+          <a:ln/>
+        </p:spPr>
+        <p:txBody>
+          <a:bodyPr wrap="square" rtlCol="0" anchor="ctr"/>
+          <a:lstStyle/>
+          <a:p>
+            <a:pPr indent="0" marL="0">
+              <a:buNone/>
+            </a:pPr>
+            <a:r>
+              <a:rPr lang="en-US" sz="1000" dirty="0">
+                <a:solidFill>
+                  <a:srgbClr val="6B7280"/>
+                </a:solidFill>
+                <a:latin typeface="Inter" pitchFamily="34" charset="0"/>
+                <a:ea typeface="Inter" pitchFamily="34" charset="-122"/>
+                <a:cs typeface="Inter" pitchFamily="34" charset="-120"/>
+              </a:rPr>
+              <a:t>Refresh: 1 hour</a:t>
+            </a:r>
+            <a:endParaRPr lang="en-US" sz="1000" dirty="0"/>
+          </a:p>
+        </p:txBody>
+      </p:sp>
+      <p:sp>
+        <p:nvSpPr>
+          <p:cNvPr id="34" name="Text 31"/>
+          <p:cNvSpPr/>
+          <p:nvPr/>
+        </p:nvSpPr>
+        <p:spPr>
+          <a:xfrm>
+            <a:off x="9281160" y="2240280"/>
+            <a:ext cx="2331720" cy="274320"/>
+          </a:xfrm>
+          <a:prstGeom prst="rect">
+            <a:avLst/>
+          </a:prstGeom>
+          <a:noFill/>
+          <a:ln/>
+        </p:spPr>
+        <p:txBody>
+          <a:bodyPr wrap="square" rtlCol="0" anchor="ctr"/>
+          <a:lstStyle/>
+          <a:p>
+            <a:pPr indent="0" marL="0">
+              <a:buNone/>
+            </a:pPr>
+            <a:r>
+              <a:rPr lang="en-US" sz="1100" b="1" dirty="0">
+                <a:solidFill>
+                  <a:srgbClr val="4CB393"/>
+                </a:solidFill>
+                <a:latin typeface="Inter" pitchFamily="34" charset="0"/>
+                <a:ea typeface="Inter" pitchFamily="34" charset="-122"/>
+                <a:cs typeface="Inter" pitchFamily="34" charset="-120"/>
+              </a:rPr>
+              <a:t>KPI: Completeness: &gt; 95%</a:t>
+            </a:r>
+            <a:endParaRPr lang="en-US" sz="1100" dirty="0"/>
+          </a:p>
+        </p:txBody>
+      </p:sp>
+      <p:sp>
+        <p:nvSpPr>
+          <p:cNvPr id="35" name="Text 32"/>
+          <p:cNvSpPr/>
+          <p:nvPr/>
+        </p:nvSpPr>
+        <p:spPr>
+          <a:xfrm>
+            <a:off x="9098280" y="2743200"/>
+            <a:ext cx="2697480" cy="274320"/>
+          </a:xfrm>
+          <a:prstGeom prst="rect">
+            <a:avLst/>
+          </a:prstGeom>
+          <a:noFill/>
+          <a:ln/>
+        </p:spPr>
+        <p:txBody>
+          <a:bodyPr wrap="square" rtlCol="0" anchor="ctr"/>
+          <a:lstStyle/>
+          <a:p>
+            <a:pPr algn="ctr" indent="0" marL="0">
+              <a:buNone/>
+            </a:pPr>
+            <a:r>
+              <a:rPr lang="en-US" sz="900" i="1" dirty="0">
+                <a:solidFill>
+                  <a:srgbClr val="A9B3B6"/>
+                </a:solidFill>
+                <a:latin typeface="Inter" pitchFamily="34" charset="0"/>
+                <a:ea typeface="Inter" pitchFamily="34" charset="-122"/>
+                <a:cs typeface="Inter" pitchFamily="34" charset="-120"/>
+              </a:rPr>
+              <a:t>Trust Score  •  API Sharing  •  Lineage</a:t>
+            </a:r>
+            <a:endParaRPr lang="en-US" sz="900" dirty="0"/>
+          </a:p>
+        </p:txBody>
+      </p:sp>
+      <p:sp>
+        <p:nvSpPr>
+          <p:cNvPr id="36" name="Shape 33"/>
+          <p:cNvSpPr/>
+          <p:nvPr/>
+        </p:nvSpPr>
+        <p:spPr>
+          <a:xfrm>
+            <a:off x="457200" y="3566160"/>
+            <a:ext cx="2697480" cy="2331720"/>
+          </a:xfrm>
+          <a:prstGeom prst="roundRect">
+            <a:avLst>
+              <a:gd name="adj" fmla="val 4706"/>
+            </a:avLst>
+          </a:prstGeom>
+          <a:solidFill>
+            <a:srgbClr val="FFFFFF"/>
+          </a:solidFill>
+          <a:ln w="19050">
+            <a:solidFill>
+              <a:srgbClr val="006580"/>
+            </a:solidFill>
+            <a:prstDash val="solid"/>
+          </a:ln>
+          <a:effectLst>
+            <a:outerShdw sx="100000" sy="100000" kx="0" ky="0" algn="bl" rotWithShape="0" blurRad="50800" dist="19050" dir="16200000">
+              <a:srgbClr val="000000">
+                <a:alpha val="8000"/>
+              </a:srgbClr>
+            </a:outerShdw>
+          </a:effectLst>
+        </p:spPr>
+      </p:sp>
+      <p:sp>
+        <p:nvSpPr>
+          <p:cNvPr id="37" name="Shape 34"/>
+          <p:cNvSpPr/>
+          <p:nvPr/>
+        </p:nvSpPr>
+        <p:spPr>
+          <a:xfrm>
+            <a:off x="530352" y="3621024"/>
+            <a:ext cx="2551176" cy="54864"/>
+          </a:xfrm>
+          <a:prstGeom prst="rect">
+            <a:avLst/>
+          </a:prstGeom>
+          <a:solidFill>
+            <a:srgbClr val="006580"/>
+          </a:solidFill>
+          <a:ln/>
+        </p:spPr>
+      </p:sp>
+      <p:sp>
+        <p:nvSpPr>
+          <p:cNvPr id="38" name="Text 35"/>
+          <p:cNvSpPr/>
+          <p:nvPr/>
+        </p:nvSpPr>
+        <p:spPr>
+          <a:xfrm>
+            <a:off x="457200" y="3749040"/>
+            <a:ext cx="2697480" cy="411480"/>
+          </a:xfrm>
+          <a:prstGeom prst="rect">
+            <a:avLst/>
+          </a:prstGeom>
+          <a:noFill/>
+          <a:ln/>
+        </p:spPr>
+        <p:txBody>
+          <a:bodyPr wrap="square" rtlCol="0" anchor="ctr"/>
+          <a:lstStyle/>
+          <a:p>
+            <a:pPr algn="ctr" indent="0" marL="0">
+              <a:buNone/>
+            </a:pPr>
+            <a:r>
+              <a:rPr lang="en-US" sz="1300" b="1" dirty="0">
+                <a:solidFill>
+                  <a:srgbClr val="19416C"/>
+                </a:solidFill>
+                <a:latin typeface="Inter" pitchFamily="34" charset="0"/>
+                <a:ea typeface="Inter" pitchFamily="34" charset="-122"/>
+                <a:cs typeface="Inter" pitchFamily="34" charset="-120"/>
+              </a:rPr>
+              <a:t>Compliance Traceability</a:t>
+            </a:r>
+            <a:endParaRPr lang="en-US" sz="1300" dirty="0"/>
+          </a:p>
+        </p:txBody>
+      </p:sp>
+      <p:sp>
+        <p:nvSpPr>
+          <p:cNvPr id="39" name="Text 36"/>
+          <p:cNvSpPr/>
+          <p:nvPr/>
+        </p:nvSpPr>
+        <p:spPr>
+          <a:xfrm>
+            <a:off x="640080" y="4251960"/>
+            <a:ext cx="2331720" cy="274320"/>
+          </a:xfrm>
+          <a:prstGeom prst="rect">
+            <a:avLst/>
+          </a:prstGeom>
+          <a:noFill/>
+          <a:ln/>
+        </p:spPr>
+        <p:txBody>
+          <a:bodyPr wrap="square" rtlCol="0" anchor="ctr"/>
+          <a:lstStyle/>
+          <a:p>
+            <a:pPr indent="0" marL="0">
+              <a:buNone/>
+            </a:pPr>
+            <a:r>
+              <a:rPr lang="en-US" sz="1000" dirty="0">
+                <a:solidFill>
+                  <a:srgbClr val="6B7280"/>
+                </a:solidFill>
+                <a:latin typeface="Inter" pitchFamily="34" charset="0"/>
+                <a:ea typeface="Inter" pitchFamily="34" charset="-122"/>
+                <a:cs typeface="Inter" pitchFamily="34" charset="-120"/>
+              </a:rPr>
+              <a:t>Owner: Dr. E. Vasquez</a:t>
+            </a:r>
+            <a:endParaRPr lang="en-US" sz="1000" dirty="0"/>
+          </a:p>
+        </p:txBody>
+      </p:sp>
+      <p:sp>
+        <p:nvSpPr>
+          <p:cNvPr id="40" name="Text 37"/>
+          <p:cNvSpPr/>
+          <p:nvPr/>
+        </p:nvSpPr>
+        <p:spPr>
+          <a:xfrm>
+            <a:off x="640080" y="4526280"/>
+            <a:ext cx="2331720" cy="274320"/>
+          </a:xfrm>
+          <a:prstGeom prst="rect">
+            <a:avLst/>
+          </a:prstGeom>
+          <a:noFill/>
+          <a:ln/>
+        </p:spPr>
+        <p:txBody>
+          <a:bodyPr wrap="square" rtlCol="0" anchor="ctr"/>
+          <a:lstStyle/>
+          <a:p>
+            <a:pPr indent="0" marL="0">
+              <a:buNone/>
+            </a:pPr>
+            <a:r>
+              <a:rPr lang="en-US" sz="1000" dirty="0">
+                <a:solidFill>
+                  <a:srgbClr val="6B7280"/>
+                </a:solidFill>
+                <a:latin typeface="Inter" pitchFamily="34" charset="0"/>
+                <a:ea typeface="Inter" pitchFamily="34" charset="-122"/>
+                <a:cs typeface="Inter" pitchFamily="34" charset="-120"/>
+              </a:rPr>
+              <a:t>Refresh: 30 min</a:t>
+            </a:r>
+            <a:endParaRPr lang="en-US" sz="1000" dirty="0"/>
+          </a:p>
+        </p:txBody>
+      </p:sp>
+      <p:sp>
+        <p:nvSpPr>
+          <p:cNvPr id="41" name="Text 38"/>
+          <p:cNvSpPr/>
+          <p:nvPr/>
+        </p:nvSpPr>
+        <p:spPr>
+          <a:xfrm>
+            <a:off x="640080" y="4800600"/>
+            <a:ext cx="2331720" cy="274320"/>
+          </a:xfrm>
+          <a:prstGeom prst="rect">
+            <a:avLst/>
+          </a:prstGeom>
+          <a:noFill/>
+          <a:ln/>
+        </p:spPr>
+        <p:txBody>
+          <a:bodyPr wrap="square" rtlCol="0" anchor="ctr"/>
+          <a:lstStyle/>
+          <a:p>
+            <a:pPr indent="0" marL="0">
+              <a:buNone/>
+            </a:pPr>
+            <a:r>
+              <a:rPr lang="en-US" sz="1100" b="1" dirty="0">
+                <a:solidFill>
+                  <a:srgbClr val="006580"/>
+                </a:solidFill>
+                <a:latin typeface="Inter" pitchFamily="34" charset="0"/>
+                <a:ea typeface="Inter" pitchFamily="34" charset="-122"/>
+                <a:cs typeface="Inter" pitchFamily="34" charset="-120"/>
+              </a:rPr>
+              <a:t>KPI: Lot capture: 100%</a:t>
+            </a:r>
+            <a:endParaRPr lang="en-US" sz="1100" dirty="0"/>
+          </a:p>
+        </p:txBody>
+      </p:sp>
+      <p:sp>
+        <p:nvSpPr>
+          <p:cNvPr id="42" name="Text 39"/>
+          <p:cNvSpPr/>
+          <p:nvPr/>
+        </p:nvSpPr>
+        <p:spPr>
+          <a:xfrm>
+            <a:off x="457200" y="5303520"/>
+            <a:ext cx="2697480" cy="274320"/>
+          </a:xfrm>
+          <a:prstGeom prst="rect">
+            <a:avLst/>
+          </a:prstGeom>
+          <a:noFill/>
+          <a:ln/>
+        </p:spPr>
+        <p:txBody>
+          <a:bodyPr wrap="square" rtlCol="0" anchor="ctr"/>
+          <a:lstStyle/>
+          <a:p>
+            <a:pPr algn="ctr" indent="0" marL="0">
+              <a:buNone/>
+            </a:pPr>
+            <a:r>
+              <a:rPr lang="en-US" sz="900" i="1" dirty="0">
+                <a:solidFill>
+                  <a:srgbClr val="A9B3B6"/>
+                </a:solidFill>
+                <a:latin typeface="Inter" pitchFamily="34" charset="0"/>
+                <a:ea typeface="Inter" pitchFamily="34" charset="-122"/>
+                <a:cs typeface="Inter" pitchFamily="34" charset="-120"/>
+              </a:rPr>
+              <a:t>Trust Score  •  API Sharing  •  Lineage</a:t>
+            </a:r>
+            <a:endParaRPr lang="en-US" sz="900" dirty="0"/>
+          </a:p>
+        </p:txBody>
+      </p:sp>
+      <p:sp>
+        <p:nvSpPr>
+          <p:cNvPr id="43" name="Shape 40"/>
+          <p:cNvSpPr/>
+          <p:nvPr/>
+        </p:nvSpPr>
+        <p:spPr>
+          <a:xfrm>
+            <a:off x="3337560" y="3566160"/>
+            <a:ext cx="2697480" cy="2331720"/>
+          </a:xfrm>
+          <a:prstGeom prst="roundRect">
+            <a:avLst>
+              <a:gd name="adj" fmla="val 4706"/>
+            </a:avLst>
+          </a:prstGeom>
+          <a:solidFill>
+            <a:srgbClr val="FFFFFF"/>
+          </a:solidFill>
+          <a:ln w="19050">
+            <a:solidFill>
+              <a:srgbClr val="009845"/>
+            </a:solidFill>
+            <a:prstDash val="solid"/>
+          </a:ln>
+          <a:effectLst>
+            <a:outerShdw sx="100000" sy="100000" kx="0" ky="0" algn="bl" rotWithShape="0" blurRad="50800" dist="19050" dir="16200000">
+              <a:srgbClr val="000000">
+                <a:alpha val="8000"/>
+              </a:srgbClr>
+            </a:outerShdw>
+          </a:effectLst>
+        </p:spPr>
+      </p:sp>
+      <p:sp>
+        <p:nvSpPr>
+          <p:cNvPr id="44" name="Shape 41"/>
+          <p:cNvSpPr/>
+          <p:nvPr/>
+        </p:nvSpPr>
+        <p:spPr>
+          <a:xfrm>
+            <a:off x="3410712" y="3621024"/>
+            <a:ext cx="2551176" cy="54864"/>
+          </a:xfrm>
+          <a:prstGeom prst="rect">
+            <a:avLst/>
+          </a:prstGeom>
+          <a:solidFill>
+            <a:srgbClr val="009845"/>
+          </a:solidFill>
+          <a:ln/>
+        </p:spPr>
+      </p:sp>
+      <p:sp>
+        <p:nvSpPr>
+          <p:cNvPr id="45" name="Text 42"/>
+          <p:cNvSpPr/>
+          <p:nvPr/>
+        </p:nvSpPr>
+        <p:spPr>
+          <a:xfrm>
+            <a:off x="3337560" y="3749040"/>
+            <a:ext cx="2697480" cy="411480"/>
+          </a:xfrm>
+          <a:prstGeom prst="rect">
+            <a:avLst/>
+          </a:prstGeom>
+          <a:noFill/>
+          <a:ln/>
+        </p:spPr>
+        <p:txBody>
+          <a:bodyPr wrap="square" rtlCol="0" anchor="ctr"/>
+          <a:lstStyle/>
+          <a:p>
+            <a:pPr algn="ctr" indent="0" marL="0">
+              <a:buNone/>
+            </a:pPr>
+            <a:r>
+              <a:rPr lang="en-US" sz="1300" b="1" dirty="0">
+                <a:solidFill>
+                  <a:srgbClr val="19416C"/>
+                </a:solidFill>
+                <a:latin typeface="Inter" pitchFamily="34" charset="0"/>
+                <a:ea typeface="Inter" pitchFamily="34" charset="-122"/>
+                <a:cs typeface="Inter" pitchFamily="34" charset="-120"/>
+              </a:rPr>
+              <a:t>Pipeline &amp; Timestamp Audit</a:t>
+            </a:r>
+            <a:endParaRPr lang="en-US" sz="1300" dirty="0"/>
+          </a:p>
+        </p:txBody>
+      </p:sp>
+      <p:sp>
+        <p:nvSpPr>
+          <p:cNvPr id="46" name="Text 43"/>
+          <p:cNvSpPr/>
+          <p:nvPr/>
+        </p:nvSpPr>
+        <p:spPr>
+          <a:xfrm>
+            <a:off x="3520440" y="4251960"/>
+            <a:ext cx="2331720" cy="274320"/>
+          </a:xfrm>
+          <a:prstGeom prst="rect">
+            <a:avLst/>
+          </a:prstGeom>
+          <a:noFill/>
+          <a:ln/>
+        </p:spPr>
+        <p:txBody>
+          <a:bodyPr wrap="square" rtlCol="0" anchor="ctr"/>
+          <a:lstStyle/>
+          <a:p>
+            <a:pPr indent="0" marL="0">
+              <a:buNone/>
+            </a:pPr>
+            <a:r>
+              <a:rPr lang="en-US" sz="1000" dirty="0">
+                <a:solidFill>
+                  <a:srgbClr val="6B7280"/>
+                </a:solidFill>
+                <a:latin typeface="Inter" pitchFamily="34" charset="0"/>
+                <a:ea typeface="Inter" pitchFamily="34" charset="-122"/>
+                <a:cs typeface="Inter" pitchFamily="34" charset="-120"/>
+              </a:rPr>
+              <a:t>Owner: P. Ramanathan</a:t>
+            </a:r>
+            <a:endParaRPr lang="en-US" sz="1000" dirty="0"/>
+          </a:p>
+        </p:txBody>
+      </p:sp>
+      <p:sp>
+        <p:nvSpPr>
+          <p:cNvPr id="47" name="Text 44"/>
+          <p:cNvSpPr/>
+          <p:nvPr/>
+        </p:nvSpPr>
+        <p:spPr>
+          <a:xfrm>
+            <a:off x="3520440" y="4526280"/>
+            <a:ext cx="2331720" cy="274320"/>
+          </a:xfrm>
+          <a:prstGeom prst="rect">
+            <a:avLst/>
+          </a:prstGeom>
+          <a:noFill/>
+          <a:ln/>
+        </p:spPr>
+        <p:txBody>
+          <a:bodyPr wrap="square" rtlCol="0" anchor="ctr"/>
+          <a:lstStyle/>
+          <a:p>
+            <a:pPr indent="0" marL="0">
+              <a:buNone/>
+            </a:pPr>
+            <a:r>
+              <a:rPr lang="en-US" sz="1000" dirty="0">
+                <a:solidFill>
+                  <a:srgbClr val="6B7280"/>
+                </a:solidFill>
+                <a:latin typeface="Inter" pitchFamily="34" charset="0"/>
+                <a:ea typeface="Inter" pitchFamily="34" charset="-122"/>
+                <a:cs typeface="Inter" pitchFamily="34" charset="-120"/>
+              </a:rPr>
+              <a:t>Refresh: 5 min</a:t>
+            </a:r>
+            <a:endParaRPr lang="en-US" sz="1000" dirty="0"/>
+          </a:p>
+        </p:txBody>
+      </p:sp>
+      <p:sp>
+        <p:nvSpPr>
+          <p:cNvPr id="48" name="Text 45"/>
+          <p:cNvSpPr/>
+          <p:nvPr/>
+        </p:nvSpPr>
+        <p:spPr>
+          <a:xfrm>
+            <a:off x="3520440" y="4800600"/>
+            <a:ext cx="2331720" cy="274320"/>
+          </a:xfrm>
+          <a:prstGeom prst="rect">
+            <a:avLst/>
+          </a:prstGeom>
+          <a:noFill/>
+          <a:ln/>
+        </p:spPr>
+        <p:txBody>
+          <a:bodyPr wrap="square" rtlCol="0" anchor="ctr"/>
+          <a:lstStyle/>
+          <a:p>
+            <a:pPr indent="0" marL="0">
+              <a:buNone/>
+            </a:pPr>
+            <a:r>
+              <a:rPr lang="en-US" sz="1100" b="1" dirty="0">
+                <a:solidFill>
+                  <a:srgbClr val="009845"/>
+                </a:solidFill>
+                <a:latin typeface="Inter" pitchFamily="34" charset="0"/>
+                <a:ea typeface="Inter" pitchFamily="34" charset="-122"/>
+                <a:cs typeface="Inter" pitchFamily="34" charset="-120"/>
+              </a:rPr>
+              <a:t>KPI: Trust Score: 0.95 target</a:t>
+            </a:r>
+            <a:endParaRPr lang="en-US" sz="1100" dirty="0"/>
+          </a:p>
+        </p:txBody>
+      </p:sp>
+      <p:sp>
+        <p:nvSpPr>
+          <p:cNvPr id="49" name="Text 46"/>
+          <p:cNvSpPr/>
+          <p:nvPr/>
+        </p:nvSpPr>
+        <p:spPr>
+          <a:xfrm>
+            <a:off x="3337560" y="5303520"/>
+            <a:ext cx="2697480" cy="274320"/>
+          </a:xfrm>
+          <a:prstGeom prst="rect">
+            <a:avLst/>
+          </a:prstGeom>
+          <a:noFill/>
+          <a:ln/>
+        </p:spPr>
+        <p:txBody>
+          <a:bodyPr wrap="square" rtlCol="0" anchor="ctr"/>
+          <a:lstStyle/>
+          <a:p>
+            <a:pPr algn="ctr" indent="0" marL="0">
+              <a:buNone/>
+            </a:pPr>
+            <a:r>
+              <a:rPr lang="en-US" sz="900" i="1" dirty="0">
+                <a:solidFill>
+                  <a:srgbClr val="A9B3B6"/>
+                </a:solidFill>
+                <a:latin typeface="Inter" pitchFamily="34" charset="0"/>
+                <a:ea typeface="Inter" pitchFamily="34" charset="-122"/>
+                <a:cs typeface="Inter" pitchFamily="34" charset="-120"/>
+              </a:rPr>
+              <a:t>Trust Score  •  API Sharing  •  Lineage</a:t>
+            </a:r>
+            <a:endParaRPr lang="en-US" sz="900" dirty="0"/>
+          </a:p>
+        </p:txBody>
+      </p:sp>
+      <p:sp>
+        <p:nvSpPr>
+          <p:cNvPr id="50" name="Shape 47"/>
+          <p:cNvSpPr/>
+          <p:nvPr/>
+        </p:nvSpPr>
+        <p:spPr>
+          <a:xfrm>
+            <a:off x="6217920" y="3566160"/>
+            <a:ext cx="2697480" cy="2331720"/>
+          </a:xfrm>
+          <a:prstGeom prst="roundRect">
+            <a:avLst>
+              <a:gd name="adj" fmla="val 4706"/>
+            </a:avLst>
+          </a:prstGeom>
+          <a:solidFill>
+            <a:srgbClr val="FFFFFF"/>
+          </a:solidFill>
+          <a:ln w="19050">
+            <a:solidFill>
+              <a:srgbClr val="19416C"/>
+            </a:solidFill>
+            <a:prstDash val="solid"/>
+          </a:ln>
+          <a:effectLst>
+            <a:outerShdw sx="100000" sy="100000" kx="0" ky="0" algn="bl" rotWithShape="0" blurRad="50800" dist="19050" dir="16200000">
+              <a:srgbClr val="000000">
+                <a:alpha val="8000"/>
+              </a:srgbClr>
+            </a:outerShdw>
+          </a:effectLst>
+        </p:spPr>
+      </p:sp>
+      <p:sp>
+        <p:nvSpPr>
+          <p:cNvPr id="51" name="Shape 48"/>
+          <p:cNvSpPr/>
+          <p:nvPr/>
+        </p:nvSpPr>
+        <p:spPr>
+          <a:xfrm>
+            <a:off x="6291072" y="3621024"/>
+            <a:ext cx="2551176" cy="54864"/>
+          </a:xfrm>
+          <a:prstGeom prst="rect">
+            <a:avLst/>
+          </a:prstGeom>
+          <a:solidFill>
+            <a:srgbClr val="19416C"/>
+          </a:solidFill>
+          <a:ln/>
+        </p:spPr>
+      </p:sp>
+      <p:sp>
+        <p:nvSpPr>
+          <p:cNvPr id="52" name="Text 49"/>
+          <p:cNvSpPr/>
+          <p:nvPr/>
+        </p:nvSpPr>
+        <p:spPr>
+          <a:xfrm>
+            <a:off x="6217920" y="3749040"/>
+            <a:ext cx="2697480" cy="411480"/>
+          </a:xfrm>
+          <a:prstGeom prst="rect">
+            <a:avLst/>
+          </a:prstGeom>
+          <a:noFill/>
+          <a:ln/>
+        </p:spPr>
+        <p:txBody>
+          <a:bodyPr wrap="square" rtlCol="0" anchor="ctr"/>
+          <a:lstStyle/>
+          <a:p>
+            <a:pPr algn="ctr" indent="0" marL="0">
+              <a:buNone/>
+            </a:pPr>
+            <a:r>
+              <a:rPr lang="en-US" sz="1300" b="1" dirty="0">
+                <a:solidFill>
+                  <a:srgbClr val="19416C"/>
+                </a:solidFill>
+                <a:latin typeface="Inter" pitchFamily="34" charset="0"/>
+                <a:ea typeface="Inter" pitchFamily="34" charset="-122"/>
+                <a:cs typeface="Inter" pitchFamily="34" charset="-120"/>
+              </a:rPr>
+              <a:t>Customer Quality Index</a:t>
+            </a:r>
+            <a:endParaRPr lang="en-US" sz="1300" dirty="0"/>
+          </a:p>
+        </p:txBody>
+      </p:sp>
+      <p:sp>
+        <p:nvSpPr>
+          <p:cNvPr id="53" name="Text 50"/>
+          <p:cNvSpPr/>
+          <p:nvPr/>
+        </p:nvSpPr>
+        <p:spPr>
+          <a:xfrm>
+            <a:off x="6400800" y="4251960"/>
+            <a:ext cx="2331720" cy="274320"/>
+          </a:xfrm>
+          <a:prstGeom prst="rect">
+            <a:avLst/>
+          </a:prstGeom>
+          <a:noFill/>
+          <a:ln/>
+        </p:spPr>
+        <p:txBody>
+          <a:bodyPr wrap="square" rtlCol="0" anchor="ctr"/>
+          <a:lstStyle/>
+          <a:p>
+            <a:pPr indent="0" marL="0">
+              <a:buNone/>
+            </a:pPr>
+            <a:r>
+              <a:rPr lang="en-US" sz="1000" dirty="0">
+                <a:solidFill>
+                  <a:srgbClr val="6B7280"/>
+                </a:solidFill>
+                <a:latin typeface="Inter" pitchFamily="34" charset="0"/>
+                <a:ea typeface="Inter" pitchFamily="34" charset="-122"/>
+                <a:cs typeface="Inter" pitchFamily="34" charset="-120"/>
+              </a:rPr>
+              <a:t>Owner: Sophie Müller</a:t>
+            </a:r>
+            <a:endParaRPr lang="en-US" sz="1000" dirty="0"/>
+          </a:p>
+        </p:txBody>
+      </p:sp>
+      <p:sp>
+        <p:nvSpPr>
+          <p:cNvPr id="54" name="Text 51"/>
+          <p:cNvSpPr/>
+          <p:nvPr/>
+        </p:nvSpPr>
+        <p:spPr>
+          <a:xfrm>
+            <a:off x="6400800" y="4526280"/>
+            <a:ext cx="2331720" cy="274320"/>
+          </a:xfrm>
+          <a:prstGeom prst="rect">
+            <a:avLst/>
+          </a:prstGeom>
+          <a:noFill/>
+          <a:ln/>
+        </p:spPr>
+        <p:txBody>
+          <a:bodyPr wrap="square" rtlCol="0" anchor="ctr"/>
+          <a:lstStyle/>
+          <a:p>
+            <a:pPr indent="0" marL="0">
+              <a:buNone/>
+            </a:pPr>
+            <a:r>
+              <a:rPr lang="en-US" sz="1000" dirty="0">
+                <a:solidFill>
+                  <a:srgbClr val="6B7280"/>
+                </a:solidFill>
+                <a:latin typeface="Inter" pitchFamily="34" charset="0"/>
+                <a:ea typeface="Inter" pitchFamily="34" charset="-122"/>
+                <a:cs typeface="Inter" pitchFamily="34" charset="-120"/>
+              </a:rPr>
+              <a:t>Refresh: 1 hour</a:t>
+            </a:r>
+            <a:endParaRPr lang="en-US" sz="1000" dirty="0"/>
+          </a:p>
+        </p:txBody>
+      </p:sp>
+      <p:sp>
+        <p:nvSpPr>
+          <p:cNvPr id="55" name="Text 52"/>
+          <p:cNvSpPr/>
+          <p:nvPr/>
+        </p:nvSpPr>
+        <p:spPr>
+          <a:xfrm>
+            <a:off x="6400800" y="4800600"/>
+            <a:ext cx="2331720" cy="274320"/>
+          </a:xfrm>
+          <a:prstGeom prst="rect">
+            <a:avLst/>
+          </a:prstGeom>
+          <a:noFill/>
+          <a:ln/>
+        </p:spPr>
+        <p:txBody>
+          <a:bodyPr wrap="square" rtlCol="0" anchor="ctr"/>
+          <a:lstStyle/>
+          <a:p>
+            <a:pPr indent="0" marL="0">
+              <a:buNone/>
+            </a:pPr>
+            <a:r>
+              <a:rPr lang="en-US" sz="1100" b="1" dirty="0">
+                <a:solidFill>
+                  <a:srgbClr val="19416C"/>
+                </a:solidFill>
+                <a:latin typeface="Inter" pitchFamily="34" charset="0"/>
+                <a:ea typeface="Inter" pitchFamily="34" charset="-122"/>
+                <a:cs typeface="Inter" pitchFamily="34" charset="-120"/>
+              </a:rPr>
+              <a:t>KPI: Address quality: &gt; 0.85</a:t>
+            </a:r>
+            <a:endParaRPr lang="en-US" sz="1100" dirty="0"/>
+          </a:p>
+        </p:txBody>
+      </p:sp>
+      <p:sp>
+        <p:nvSpPr>
+          <p:cNvPr id="56" name="Text 53"/>
+          <p:cNvSpPr/>
+          <p:nvPr/>
+        </p:nvSpPr>
+        <p:spPr>
+          <a:xfrm>
+            <a:off x="6217920" y="5303520"/>
             <a:ext cx="2697480" cy="274320"/>
           </a:xfrm>
           <a:prstGeom prst="rect">
